--- a/en/slides/00-Computer_Architecture-Course_Introduction-Lab.pptx
+++ b/en/slides/00-Computer_Architecture-Course_Introduction-Lab.pptx
@@ -116,24 +116,24 @@
   <p:extLst>
     <p:ext uri="{521415D9-36F7-43E2-AB2F-B90AF26B5E84}">
       <p14:sectionLst xmlns:p14="http://schemas.microsoft.com/office/powerpoint/2010/main">
-        <p14:section name="Opening" id="{9ddb9689-325a-7de9-73f2-8ae2d9da59cd}">
+        <p14:section name="Opening" id="{581ef9e3-ca17-9ebd-f54a-4cc49d4e7220}">
           <p14:sldIdLst>
             <p14:sldId id="256"/>
             <p14:sldId id="257"/>
           </p14:sldIdLst>
         </p14:section>
-        <p14:section name="Material and first contact" id="{0029801b-dc87-6f06-1c62-e8c5a1650589}">
+        <p14:section name="Material and first contact" id="{e8f6d31c-a337-8df5-b6ec-912ed2a88c79}">
           <p14:sldIdLst>
             <p14:sldId id="258"/>
           </p14:sldIdLst>
         </p14:section>
-        <p14:section name="The complete program" id="{30aac942-71a7-6e70-325e-2bd39caa89c4}">
+        <p14:section name="The complete program" id="{3dc57865-7db0-c916-6859-12d6aced2cb3}">
           <p14:sldIdLst>
             <p14:sldId id="259"/>
             <p14:sldId id="260"/>
           </p14:sldIdLst>
         </p14:section>
-        <p14:section name="Run it and test it" id="{9f08efac-ad16-58aa-216c-a493400958e5}">
+        <p14:section name="Run it and test it" id="{eeb20d2b-e55a-4e0a-60d8-3e634d3524c6}">
           <p14:sldIdLst>
             <p14:sldId id="261"/>
             <p14:sldId id="262"/>
@@ -547,6 +547,7 @@
             <a:r>
               <a:rPr lang="en-US" dirty="0"/>
               <a:t>This is the code deck of Lecture 00. Where the lecture deck develops the concepts, this deck contains everything that is written and executed: each listing with its commentary, the complete program of the lecture, the output it is expected to produce, and the procedure for testing it on each of the three hosts. The two decks are meant to be read together: the concepts explain the code, and the code gives the concepts an observable consequence.
+For those who have never programmed, a few words that this deck uses. The source code of a program is the text that a person writes. The repository is the online folder, on GitHub, where all the source code of the course is kept together with its history. The toolchain is the set of programs that translates source code into a cartridge. The terminal is a window in which one types commands instead of clicking. A port, such as 8080, is a numbered door through which one program receives messages from another. Flash memory is the kind that keeps its contents when the power is off, as in a USB stick. None of this has to be mastered today: Lecture 01 installs the tools and teaches the terminal step by step, and Lecture 02 teaches how to read every line of the program shown here.
 Learning status: UNDERSTAND NOW, by the end of this lecture you explain it, trace it and apply it on your own; USE NOW, you follow and use the recipe today; how it works inside is explained later, or is not part of the course; UNDERSTAND LATER, recognise the name and what it is for; a later lecture explains it. A slide without a badge is context: a story, an example, a question, an exercise.
 Learning status of this lecture. UNDERSTAND NOW: the program-first method; the rules of the course. USE NOW: the complete program, the PRG32 tools (used, not studied, in this course). UNDERSTAND LATER: the pieces of PRG32 (Lecture 01); RISC and an open ISA (Lecture 03); the Verm1 project (Lecture 07). A slide without a badge is context: a story, an example, a question, an exercise.</a:t>
             </a:r>

--- a/en/slides/00-Computer_Architecture-Course_Introduction-Lab.pptx
+++ b/en/slides/00-Computer_Architecture-Course_Introduction-Lab.pptx
@@ -116,24 +116,24 @@
   <p:extLst>
     <p:ext uri="{521415D9-36F7-43E2-AB2F-B90AF26B5E84}">
       <p14:sectionLst xmlns:p14="http://schemas.microsoft.com/office/powerpoint/2010/main">
-        <p14:section name="Opening" id="{581ef9e3-ca17-9ebd-f54a-4cc49d4e7220}">
+        <p14:section name="Opening" id="{7c83fb57-804f-31e2-39c0-7beda4cd8389}">
           <p14:sldIdLst>
             <p14:sldId id="256"/>
             <p14:sldId id="257"/>
           </p14:sldIdLst>
         </p14:section>
-        <p14:section name="Material and first contact" id="{e8f6d31c-a337-8df5-b6ec-912ed2a88c79}">
+        <p14:section name="Material and first contact" id="{393e98a5-5c3d-6fb3-5b37-6e090b28ec59}">
           <p14:sldIdLst>
             <p14:sldId id="258"/>
           </p14:sldIdLst>
         </p14:section>
-        <p14:section name="The complete program" id="{3dc57865-7db0-c916-6859-12d6aced2cb3}">
+        <p14:section name="The complete program" id="{664ad64b-779f-959e-d58b-7dc77f3a4eeb}">
           <p14:sldIdLst>
             <p14:sldId id="259"/>
             <p14:sldId id="260"/>
           </p14:sldIdLst>
         </p14:section>
-        <p14:section name="Run it and test it" id="{eeb20d2b-e55a-4e0a-60d8-3e634d3524c6}">
+        <p14:section name="Run it and test it" id="{e2267b70-7c02-89dd-22b7-49ecf7bf7ab4}">
           <p14:sldIdLst>
             <p14:sldId id="261"/>
             <p14:sldId id="262"/>
@@ -549,7 +549,8 @@
               <a:t>This is the code deck of Lecture 00. Where the lecture deck develops the concepts, this deck contains everything that is written and executed: each listing with its commentary, the complete program of the lecture, the output it is expected to produce, and the procedure for testing it on each of the three hosts. The two decks are meant to be read together: the concepts explain the code, and the code gives the concepts an observable consequence.
 For those who have never programmed, a few words that this deck uses. The source code of a program is the text that a person writes. The repository is the online folder, on GitHub, where all the source code of the course is kept together with its history. The toolchain is the set of programs that translates source code into a cartridge. The terminal is a window in which one types commands instead of clicking. A port, such as 8080, is a numbered door through which one program receives messages from another. Flash memory is the kind that keeps its contents when the power is off, as in a USB stick. None of this has to be mastered today: Lecture 01 installs the tools and teaches the terminal step by step, and Lecture 02 teaches how to read every line of the program shown here.
 Learning status: UNDERSTAND NOW, by the end of this lecture you explain it, trace it and apply it on your own; USE NOW, you follow and use the recipe today; how it works inside is explained later, or is not part of the course; UNDERSTAND LATER, recognise the name and what it is for; a later lecture explains it. A slide without a badge is context: a story, an example, a question, an exercise.
-Learning status of this lecture. UNDERSTAND NOW: the program-first method; the rules of the course. USE NOW: the complete program, the PRG32 tools (used, not studied, in this course). UNDERSTAND LATER: the pieces of PRG32 (Lecture 01); RISC and an open ISA (Lecture 03); the Verm1 project (Lecture 07). A slide without a badge is context: a story, an example, a question, an exercise.</a:t>
+Learning status of this lecture. UNDERSTAND NOW: the program-first method; the rules of the course. USE NOW: the complete program, the PRG32 tools (used, not studied, in this course). UNDERSTAND LATER: the pieces of PRG32 (Lecture 01); RISC and an open ISA (Lecture 03); the Verm1 project (Lecture 07). A slide without a badge is context: a story, an example, a question, an exercise.
+Roadmap. Today's outcomes: (1) describe the four steps of the learning spiral and say why a prediction comes before running; (2) state the assessment rules: one midterm, two exam parts that must both be passed, no devices and no AI. Builds on: nothing: it is the first lecture. Next: Lecture 01, PRG32 and PRG32-QT: Setting Up Your Workshop.</a:t>
             </a:r>
             <a:endParaRPr lang="en-US" dirty="0"/>
           </a:p>
